--- a/cs701/slides/week-05.pptx
+++ b/cs701/slides/week-05.pptx
@@ -5771,7 +5771,7 @@
                   <a:srgbClr val="01AEFD"/>
                 </a:solidFill>
               </a:rPr>
-              <a:t>Type this into RandomNumbers.java   -   line 1</a:t>
+              <a:t>Make a new file, RandomNumbers.java, and type this in   -   line 1</a:t>
             </a:r>
           </a:p>
         </p:txBody>
@@ -6349,7 +6349,7 @@
                   <a:srgbClr val="DCECEF"/>
                 </a:solidFill>
               </a:rPr>
-              <a:t>Opens the class. Its name must be the file's name without .java - RandomNumbers lives in RandomNumbers.java - and every other line goes inside its braces.</a:t>
+              <a:t>Opens the class: RandomNumbers, the file's name without .java.</a:t>
             </a:r>
           </a:p>
         </p:txBody>
@@ -9624,7 +9624,7 @@
                   <a:srgbClr val="01AEFD"/>
                 </a:solidFill>
               </a:rPr>
-              <a:t>Type this into GuessingGame.java   -   line 1</a:t>
+              <a:t>Make a new file, GuessingGame.java, and type this in   -   line 1</a:t>
             </a:r>
           </a:p>
         </p:txBody>
@@ -10085,7 +10085,7 @@
                   <a:srgbClr val="DCECEF"/>
                 </a:solidFill>
               </a:rPr>
-              <a:t>Opens the class. Its name must be the file's name without .java - GuessingGame lives in GuessingGame.java - and every other line goes inside its braces.</a:t>
+              <a:t>Opens the class: GuessingGame, the file's name without .java.</a:t>
             </a:r>
           </a:p>
         </p:txBody>
@@ -11254,7 +11254,7 @@
                   <a:srgbClr val="01AEFD"/>
                 </a:solidFill>
               </a:rPr>
-              <a:t>Type this into MultiplicationTable.java   -   line 1</a:t>
+              <a:t>Make a new file, MultiplicationTable.java, and type this in   -   line 1</a:t>
             </a:r>
           </a:p>
         </p:txBody>
@@ -15322,7 +15322,7 @@
                   <a:srgbClr val="DCECEF"/>
                 </a:solidFill>
               </a:rPr>
-              <a:t>Opens the class. Its name must be the file's name without .java - MultiplicationTable lives in MultiplicationTable.java - and every other line goes inside its braces.</a:t>
+              <a:t>Opens the class: MultiplicationTable, the file's name without .java.</a:t>
             </a:r>
           </a:p>
         </p:txBody>
@@ -15508,7 +15508,7 @@
                   <a:srgbClr val="01AEFD"/>
                 </a:solidFill>
               </a:rPr>
-              <a:t>Type this into NumberSeriesPrinter.java   -   line 1</a:t>
+              <a:t>Make a new file, NumberSeriesPrinter.java, and type this in   -   line 1</a:t>
             </a:r>
           </a:p>
         </p:txBody>
@@ -15779,7 +15779,7 @@
                   <a:srgbClr val="DCECEF"/>
                 </a:solidFill>
               </a:rPr>
-              <a:t>Opens the class. Its name must be the file's name without .java - NumberSeriesPrinter lives in NumberSeriesPrinter.java - and every other line goes inside its braces.</a:t>
+              <a:t>Opens the class: NumberSeriesPrinter, the file's name without .java.</a:t>
             </a:r>
           </a:p>
         </p:txBody>
